--- a/kvcache/unified_kv_memory/项目SR需求关系关联架构图.pptx
+++ b/kvcache/unified_kv_memory/项目SR需求关系关联架构图.pptx
@@ -3175,7 +3175,7 @@
               </a:defRPr>
             </a:pPr>
             <a:r>
-              <a:t>顶层架构约束与 SR 功能闭包边界全景视图（基于 SRS V2.2 / 全量需求树 V2.3.1，38 个 SR 全量精准映射）</a:t>
+              <a:t>顶层架构约束与 SR 功能闭包边界全景视图（基于 SRS V2.2 / 全量需求树 V2.3.1 补充版，38 个 SR 全量精准映射）</a:t>
             </a:r>
           </a:p>
         </p:txBody>
@@ -3405,7 +3405,7 @@
               </a:defRPr>
             </a:pPr>
             <a:r>
-              <a:t>vLLM/SGLang 统一 Connector 与 SDK</a:t>
+              <a:t>vLLM/SGLang 统一 KVConnector SDK</a:t>
             </a:r>
           </a:p>
         </p:txBody>
@@ -4076,7 +4076,7 @@
           <a:lstStyle/>
           <a:p>
             <a:pPr algn="ctr">
-              <a:defRPr sz="720" b="1">
+              <a:defRPr sz="700" b="1">
                 <a:solidFill>
                   <a:srgbClr val="1E40AF"/>
                 </a:solidFill>
@@ -4089,7 +4089,7 @@
           </a:p>
           <a:p>
             <a:pPr>
-              <a:defRPr sz="760" b="1">
+              <a:defRPr sz="750" b="1">
                 <a:solidFill>
                   <a:srgbClr val="0F172A"/>
                 </a:solidFill>
@@ -4097,7 +4097,7 @@
               </a:defRPr>
             </a:pPr>
             <a:r>
-              <a:t>跨框架前缀匹配引擎</a:t>
+              <a:t>跨框架低时延前缀匹配引擎</a:t>
             </a:r>
           </a:p>
         </p:txBody>
@@ -4144,7 +4144,7 @@
           <a:lstStyle/>
           <a:p>
             <a:pPr algn="ctr">
-              <a:defRPr sz="720" b="1">
+              <a:defRPr sz="700" b="1">
                 <a:solidFill>
                   <a:srgbClr val="1E40AF"/>
                 </a:solidFill>
@@ -4157,7 +4157,7 @@
           </a:p>
           <a:p>
             <a:pPr>
-              <a:defRPr sz="760" b="1">
+              <a:defRPr sz="750" b="1">
                 <a:solidFill>
                   <a:srgbClr val="0F172A"/>
                 </a:solidFill>
@@ -4165,7 +4165,7 @@
               </a:defRPr>
             </a:pPr>
             <a:r>
-              <a:t>本地元数据缓存与快判</a:t>
+              <a:t>本地元数据缓存与批量快判</a:t>
             </a:r>
           </a:p>
         </p:txBody>
@@ -4212,7 +4212,7 @@
           <a:lstStyle/>
           <a:p>
             <a:pPr algn="ctr">
-              <a:defRPr sz="720" b="1">
+              <a:defRPr sz="700" b="1">
                 <a:solidFill>
                   <a:srgbClr val="1E40AF"/>
                 </a:solidFill>
@@ -4225,7 +4225,7 @@
           </a:p>
           <a:p>
             <a:pPr>
-              <a:defRPr sz="760" b="1">
+              <a:defRPr sz="750" b="1">
                 <a:solidFill>
                   <a:srgbClr val="0F172A"/>
                 </a:solidFill>
@@ -4233,7 +4233,7 @@
               </a:defRPr>
             </a:pPr>
             <a:r>
-              <a:t>集群前缀目录 HA 服务</a:t>
+              <a:t>集群前缀目录核心与 HA 服务</a:t>
             </a:r>
           </a:p>
         </p:txBody>
@@ -4280,7 +4280,7 @@
           <a:lstStyle/>
           <a:p>
             <a:pPr algn="ctr">
-              <a:defRPr sz="720" b="1">
+              <a:defRPr sz="700" b="1">
                 <a:solidFill>
                   <a:srgbClr val="1E40AF"/>
                 </a:solidFill>
@@ -4293,7 +4293,7 @@
           </a:p>
           <a:p>
             <a:pPr>
-              <a:defRPr sz="760" b="1">
+              <a:defRPr sz="750" b="1">
                 <a:solidFill>
                   <a:srgbClr val="0F172A"/>
                 </a:solidFill>
@@ -4301,7 +4301,7 @@
               </a:defRPr>
             </a:pPr>
             <a:r>
-              <a:t>前缀目录本地快路径</a:t>
+              <a:t>前缀目录本地快路径与资格检查</a:t>
             </a:r>
           </a:p>
         </p:txBody>
@@ -4450,7 +4450,7 @@
               </a:defRPr>
             </a:pPr>
             <a:r>
-              <a:t>HBM↔SSD 分层容量与 DDR</a:t>
+              <a:t>HBM↔SSD 分层容量与 DDR 角色</a:t>
             </a:r>
           </a:p>
         </p:txBody>
@@ -4518,7 +4518,7 @@
               </a:defRPr>
             </a:pPr>
             <a:r>
-              <a:t>生命周期与空间治理控制器</a:t>
+              <a:t>KV 生命周期与空间治理控制器</a:t>
             </a:r>
           </a:p>
         </p:txBody>
@@ -4586,7 +4586,7 @@
               </a:defRPr>
             </a:pPr>
             <a:r>
-              <a:t>共享 Attach 与快速回退</a:t>
+              <a:t>共享 Attach、租约与快速回退</a:t>
             </a:r>
           </a:p>
         </p:txBody>
@@ -4654,7 +4654,7 @@
               </a:defRPr>
             </a:pPr>
             <a:r>
-              <a:t>KV 发布与迁移一致性</a:t>
+              <a:t>KV 发布、可见性与迁移一致性</a:t>
             </a:r>
           </a:p>
         </p:txBody>
@@ -4722,7 +4722,7 @@
               </a:defRPr>
             </a:pPr>
             <a:r>
-              <a:t>多租户隔离与 QoS 控制</a:t>
+              <a:t>多租户隔离与前后台 QoS 控制</a:t>
             </a:r>
           </a:p>
         </p:txBody>
@@ -4790,7 +4790,7 @@
               </a:defRPr>
             </a:pPr>
             <a:r>
-              <a:t>容量画像与生命周期配置</a:t>
+              <a:t>模型 KV 容量画像与生命周期配置</a:t>
             </a:r>
           </a:p>
         </p:txBody>
@@ -4858,7 +4858,7 @@
               </a:defRPr>
             </a:pPr>
             <a:r>
-              <a:t>热/冷 KV 分层与复用策略</a:t>
+              <a:t>热/冷 KV 分层驻留与复用策略</a:t>
             </a:r>
           </a:p>
         </p:txBody>
@@ -4999,7 +4999,7 @@
           </a:p>
           <a:p>
             <a:pPr>
-              <a:defRPr sz="750" b="1">
+              <a:defRPr sz="730" b="1">
                 <a:solidFill>
                   <a:srgbClr val="0F172A"/>
                 </a:solidFill>
@@ -5067,7 +5067,7 @@
           </a:p>
           <a:p>
             <a:pPr>
-              <a:defRPr sz="750" b="1">
+              <a:defRPr sz="730" b="1">
                 <a:solidFill>
                   <a:srgbClr val="0F172A"/>
                 </a:solidFill>
@@ -5075,7 +5075,7 @@
               </a:defRPr>
             </a:pPr>
             <a:r>
-              <a:t>QueryPlan 与多副本决策</a:t>
+              <a:t>QueryPlan 与多副本成本决策</a:t>
             </a:r>
           </a:p>
         </p:txBody>
@@ -5135,7 +5135,7 @@
           </a:p>
           <a:p>
             <a:pPr>
-              <a:defRPr sz="750" b="1">
+              <a:defRPr sz="730" b="1">
                 <a:solidFill>
                   <a:srgbClr val="0F172A"/>
                 </a:solidFill>
@@ -5203,7 +5203,7 @@
           </a:p>
           <a:p>
             <a:pPr>
-              <a:defRPr sz="750" b="1">
+              <a:defRPr sz="730" b="1">
                 <a:solidFill>
                   <a:srgbClr val="0F172A"/>
                 </a:solidFill>
@@ -5271,7 +5271,7 @@
           </a:p>
           <a:p>
             <a:pPr>
-              <a:defRPr sz="750" b="1">
+              <a:defRPr sz="730" b="1">
                 <a:solidFill>
                   <a:srgbClr val="0F172A"/>
                 </a:solidFill>
@@ -5279,7 +5279,7 @@
               </a:defRPr>
             </a:pPr>
             <a:r>
-              <a:t>一对多共享与多播 Provider</a:t>
+              <a:t>一对多共享与可选多播 Provider</a:t>
             </a:r>
           </a:p>
         </p:txBody>
@@ -5339,7 +5339,7 @@
           </a:p>
           <a:p>
             <a:pPr>
-              <a:defRPr sz="750" b="1">
+              <a:defRPr sz="730" b="1">
                 <a:solidFill>
                   <a:srgbClr val="0F172A"/>
                 </a:solidFill>
@@ -5618,7 +5618,7 @@
               </a:defRPr>
             </a:pPr>
             <a:r>
-              <a:t>跨节点 RDMA 零拷贝</a:t>
+              <a:t>跨节点 RDMA 零拷贝 Provider</a:t>
             </a:r>
           </a:p>
         </p:txBody>
@@ -5686,7 +5686,7 @@
               </a:defRPr>
             </a:pPr>
             <a:r>
-              <a:t>SSD/对象存储容量后端</a:t>
+              <a:t>HBM↔SSD/Object 容量后端</a:t>
             </a:r>
           </a:p>
         </p:txBody>
@@ -5754,7 +5754,7 @@
               </a:defRPr>
             </a:pPr>
             <a:r>
-              <a:t>DPU Codec 条件卸载包</a:t>
+              <a:t>DPU/硬件 Codec 条件卸载包</a:t>
             </a:r>
           </a:p>
         </p:txBody>
@@ -5822,7 +5822,7 @@
               </a:defRPr>
             </a:pPr>
             <a:r>
-              <a:t>UBMEM Direct View</a:t>
+              <a:t>UBMEM Direct View 安全访问</a:t>
             </a:r>
           </a:p>
         </p:txBody>
@@ -5890,7 +5890,7 @@
               </a:defRPr>
             </a:pPr>
             <a:r>
-              <a:t>完整性与 RAS 映射</a:t>
+              <a:t>完整性证据与 RAS 故障映射</a:t>
             </a:r>
           </a:p>
         </p:txBody>
@@ -5958,7 +5958,7 @@
               </a:defRPr>
             </a:pPr>
             <a:r>
-              <a:t>安全访问与下线</a:t>
+              <a:t>安全访问、资源下线与地址切换</a:t>
             </a:r>
           </a:p>
         </p:txBody>
@@ -6188,7 +6188,7 @@
               </a:defRPr>
             </a:pPr>
             <a:r>
-              <a:t>KV 全路径 Telemetry 与语义指标 SDK</a:t>
+              <a:t>KV 全路径 Telemetry 与指标 SDK</a:t>
             </a:r>
           </a:p>
         </p:txBody>
@@ -6256,7 +6256,7 @@
               </a:defRPr>
             </a:pPr>
             <a:r>
-              <a:t>链路追踪、Fallback 与 KVInspect 工具</a:t>
+              <a:t>链路追踪、Fallback 与 KVInspect</a:t>
             </a:r>
           </a:p>
         </p:txBody>

--- a/kvcache/unified_kv_memory/项目SR需求关系关联架构图.pptx
+++ b/kvcache/unified_kv_memory/项目SR需求关系关联架构图.pptx
@@ -3139,8 +3139,8 @@
         </p:nvSpPr>
         <p:spPr>
           <a:xfrm>
-            <a:off x="274320" y="109728"/>
-            <a:ext cx="11643055" cy="621792"/>
+            <a:off x="320040" y="109728"/>
+            <a:ext cx="11551615" cy="621792"/>
           </a:xfrm>
           <a:prstGeom prst="rect">
             <a:avLst/>
@@ -3154,7 +3154,7 @@
           <a:lstStyle/>
           <a:p>
             <a:pPr>
-              <a:defRPr sz="1800" b="1">
+              <a:defRPr sz="1750" b="1">
                 <a:solidFill>
                   <a:srgbClr val="0F172A"/>
                 </a:solidFill>
@@ -3167,7 +3167,7 @@
           </a:p>
           <a:p>
             <a:pPr>
-              <a:defRPr sz="950">
+              <a:defRPr sz="919">
                 <a:solidFill>
                   <a:srgbClr val="475569"/>
                 </a:solidFill>
@@ -3175,7 +3175,7 @@
               </a:defRPr>
             </a:pPr>
             <a:r>
-              <a:t>顶层架构约束与 SR 功能闭包边界全景视图（基于 SRS V2.2 / 全量需求树 V2.3.1 补充版，38 个 SR 全量精准映射）</a:t>
+              <a:t>顶层架构约束与 SR 功能闭包边界全景视图（基于 SRS V2.3 收敛版 / 全量需求树 V2.3.1 补充版，38 个 SR 全量精准映射）</a:t>
             </a:r>
           </a:p>
         </p:txBody>
@@ -3248,7 +3248,7 @@
           <a:lstStyle/>
           <a:p>
             <a:pPr>
-              <a:defRPr sz="980" b="1">
+              <a:defRPr sz="950" b="1">
                 <a:solidFill>
                   <a:srgbClr val="1E40AF"/>
                 </a:solidFill>
@@ -3269,7 +3269,7 @@
         </p:nvSpPr>
         <p:spPr>
           <a:xfrm>
-            <a:off x="411480" y="1051560"/>
+            <a:off x="411480" y="1042415"/>
             <a:ext cx="8412480" cy="1051560"/>
           </a:xfrm>
           <a:prstGeom prst="rect">
@@ -3314,7 +3314,7 @@
         </p:nvSpPr>
         <p:spPr>
           <a:xfrm>
-            <a:off x="502920" y="1078992"/>
+            <a:off x="502920" y="1069848"/>
             <a:ext cx="8229600" cy="182880"/>
           </a:xfrm>
           <a:prstGeom prst="rect">
@@ -3329,7 +3329,7 @@
           <a:lstStyle/>
           <a:p>
             <a:pPr>
-              <a:defRPr sz="919" b="1">
+              <a:defRPr sz="900" b="1">
                 <a:solidFill>
                   <a:srgbClr val="0369A1"/>
                 </a:solidFill>
@@ -3350,7 +3350,7 @@
         </p:nvSpPr>
         <p:spPr>
           <a:xfrm>
-            <a:off x="502920" y="1298448"/>
+            <a:off x="502920" y="1289304"/>
             <a:ext cx="1325880" cy="731520"/>
           </a:xfrm>
           <a:prstGeom prst="rect">
@@ -3380,11 +3380,11 @@
           </a:fontRef>
         </p:style>
         <p:txBody>
-          <a:bodyPr rtlCol="0" anchor="ctr" wrap="square" lIns="36576" rIns="36576" tIns="36576" bIns="36576"/>
+          <a:bodyPr rtlCol="0" anchor="ctr" wrap="square" lIns="27432" rIns="27432" tIns="27432" bIns="27432"/>
           <a:lstStyle/>
           <a:p>
             <a:pPr algn="ctr">
-              <a:defRPr sz="720" b="1">
+              <a:defRPr sz="670" b="1">
                 <a:solidFill>
                   <a:srgbClr val="FEF08A"/>
                 </a:solidFill>
@@ -3392,12 +3392,12 @@
               </a:defRPr>
             </a:pPr>
             <a:r>
-              <a:t>SR23-02-01-01 [协议与 SDK]</a:t>
+              <a:t>SR23-02-01-01 [协议与SDK]</a:t>
             </a:r>
           </a:p>
           <a:p>
             <a:pPr>
-              <a:defRPr sz="850" b="1">
+              <a:defRPr sz="819" b="1">
                 <a:solidFill>
                   <a:srgbClr val="FFFFFF"/>
                 </a:solidFill>
@@ -3405,7 +3405,11 @@
               </a:defRPr>
             </a:pPr>
             <a:r>
-              <a:t>vLLM/SGLang 统一 KVConnector SDK</a:t>
+              <a:t>vLLM/SGLang 统一协议</a:t>
+            </a:r>
+            <a:br/>
+            <a:r>
+              <a:t>与 KVConnector SDK</a:t>
             </a:r>
           </a:p>
         </p:txBody>
@@ -3418,7 +3422,7 @@
         </p:nvSpPr>
         <p:spPr>
           <a:xfrm>
-            <a:off x="1883664" y="1298448"/>
+            <a:off x="1883664" y="1289304"/>
             <a:ext cx="1325880" cy="731520"/>
           </a:xfrm>
           <a:prstGeom prst="rect">
@@ -3448,11 +3452,11 @@
           </a:fontRef>
         </p:style>
         <p:txBody>
-          <a:bodyPr rtlCol="0" anchor="ctr" wrap="square" lIns="36576" rIns="36576" tIns="36576" bIns="36576"/>
+          <a:bodyPr rtlCol="0" anchor="ctr" wrap="square" lIns="27432" rIns="27432" tIns="27432" bIns="27432"/>
           <a:lstStyle/>
           <a:p>
             <a:pPr algn="ctr">
-              <a:defRPr sz="720" b="1">
+              <a:defRPr sz="670" b="1">
                 <a:solidFill>
                   <a:srgbClr val="0369A1"/>
                 </a:solidFill>
@@ -3465,7 +3469,7 @@
           </a:p>
           <a:p>
             <a:pPr>
-              <a:defRPr sz="760" b="1">
+              <a:defRPr sz="740" b="1">
                 <a:solidFill>
                   <a:srgbClr val="0F172A"/>
                 </a:solidFill>
@@ -3473,7 +3477,11 @@
               </a:defRPr>
             </a:pPr>
             <a:r>
-              <a:t>前缀预算、加载重算与水位准入</a:t>
+              <a:t>前缀预算、加载重算</a:t>
+            </a:r>
+            <a:br/>
+            <a:r>
+              <a:t>与水位准入</a:t>
             </a:r>
           </a:p>
         </p:txBody>
@@ -3486,7 +3494,7 @@
         </p:nvSpPr>
         <p:spPr>
           <a:xfrm>
-            <a:off x="3264408" y="1298448"/>
+            <a:off x="3264408" y="1289304"/>
             <a:ext cx="1325880" cy="731520"/>
           </a:xfrm>
           <a:prstGeom prst="rect">
@@ -3516,11 +3524,11 @@
           </a:fontRef>
         </p:style>
         <p:txBody>
-          <a:bodyPr rtlCol="0" anchor="ctr" wrap="square" lIns="36576" rIns="36576" tIns="36576" bIns="36576"/>
+          <a:bodyPr rtlCol="0" anchor="ctr" wrap="square" lIns="27432" rIns="27432" tIns="27432" bIns="27432"/>
           <a:lstStyle/>
           <a:p>
             <a:pPr algn="ctr">
-              <a:defRPr sz="720" b="1">
+              <a:defRPr sz="670" b="1">
                 <a:solidFill>
                   <a:srgbClr val="0369A1"/>
                 </a:solidFill>
@@ -3533,7 +3541,7 @@
           </a:p>
           <a:p>
             <a:pPr>
-              <a:defRPr sz="760" b="1">
+              <a:defRPr sz="740" b="1">
                 <a:solidFill>
                   <a:srgbClr val="0F172A"/>
                 </a:solidFill>
@@ -3541,7 +3549,11 @@
               </a:defRPr>
             </a:pPr>
             <a:r>
-              <a:t>缓存感知路由与异构存储调度</a:t>
+              <a:t>缓存感知路由与</a:t>
+            </a:r>
+            <a:br/>
+            <a:r>
+              <a:t>异构存储调度</a:t>
             </a:r>
           </a:p>
         </p:txBody>
@@ -3554,7 +3566,7 @@
         </p:nvSpPr>
         <p:spPr>
           <a:xfrm>
-            <a:off x="4645152" y="1298448"/>
+            <a:off x="4645152" y="1289304"/>
             <a:ext cx="1325880" cy="731520"/>
           </a:xfrm>
           <a:prstGeom prst="rect">
@@ -3584,11 +3596,11 @@
           </a:fontRef>
         </p:style>
         <p:txBody>
-          <a:bodyPr rtlCol="0" anchor="ctr" wrap="square" lIns="36576" rIns="36576" tIns="36576" bIns="36576"/>
+          <a:bodyPr rtlCol="0" anchor="ctr" wrap="square" lIns="27432" rIns="27432" tIns="27432" bIns="27432"/>
           <a:lstStyle/>
           <a:p>
             <a:pPr algn="ctr">
-              <a:defRPr sz="720" b="1">
+              <a:defRPr sz="670" b="1">
                 <a:solidFill>
                   <a:srgbClr val="0369A1"/>
                 </a:solidFill>
@@ -3601,7 +3613,7 @@
           </a:p>
           <a:p>
             <a:pPr>
-              <a:defRPr sz="760" b="1">
+              <a:defRPr sz="740" b="1">
                 <a:solidFill>
                   <a:srgbClr val="0F172A"/>
                 </a:solidFill>
@@ -3609,7 +3621,11 @@
               </a:defRPr>
             </a:pPr>
             <a:r>
-              <a:t>KV 卸载/加载、分层回源与流水线</a:t>
+              <a:t>KV 卸载/加载、分层</a:t>
+            </a:r>
+            <a:br/>
+            <a:r>
+              <a:t>回源与流水线</a:t>
             </a:r>
           </a:p>
         </p:txBody>
@@ -3622,7 +3638,7 @@
         </p:nvSpPr>
         <p:spPr>
           <a:xfrm>
-            <a:off x="6025896" y="1298448"/>
+            <a:off x="6025896" y="1289304"/>
             <a:ext cx="1325880" cy="731520"/>
           </a:xfrm>
           <a:prstGeom prst="rect">
@@ -3652,11 +3668,11 @@
           </a:fontRef>
         </p:style>
         <p:txBody>
-          <a:bodyPr rtlCol="0" anchor="ctr" wrap="square" lIns="36576" rIns="36576" tIns="36576" bIns="36576"/>
+          <a:bodyPr rtlCol="0" anchor="ctr" wrap="square" lIns="27432" rIns="27432" tIns="27432" bIns="27432"/>
           <a:lstStyle/>
           <a:p>
             <a:pPr algn="ctr">
-              <a:defRPr sz="720" b="1">
+              <a:defRPr sz="670" b="1">
                 <a:solidFill>
                   <a:srgbClr val="0369A1"/>
                 </a:solidFill>
@@ -3669,7 +3685,7 @@
           </a:p>
           <a:p>
             <a:pPr>
-              <a:defRPr sz="760" b="1">
+              <a:defRPr sz="740" b="1">
                 <a:solidFill>
                   <a:srgbClr val="0F172A"/>
                 </a:solidFill>
@@ -3677,7 +3693,11 @@
               </a:defRPr>
             </a:pPr>
             <a:r>
-              <a:t>投机预取与效果反馈组件</a:t>
+              <a:t>投机预取与</a:t>
+            </a:r>
+            <a:br/>
+            <a:r>
+              <a:t>效果反馈组件</a:t>
             </a:r>
           </a:p>
         </p:txBody>
@@ -3690,7 +3710,7 @@
         </p:nvSpPr>
         <p:spPr>
           <a:xfrm>
-            <a:off x="7406640" y="1298448"/>
+            <a:off x="7406640" y="1289304"/>
             <a:ext cx="1325880" cy="731520"/>
           </a:xfrm>
           <a:prstGeom prst="rect">
@@ -3720,11 +3740,11 @@
           </a:fontRef>
         </p:style>
         <p:txBody>
-          <a:bodyPr rtlCol="0" anchor="ctr" wrap="square" lIns="36576" rIns="36576" tIns="36576" bIns="36576"/>
+          <a:bodyPr rtlCol="0" anchor="ctr" wrap="square" lIns="27432" rIns="27432" tIns="27432" bIns="27432"/>
           <a:lstStyle/>
           <a:p>
             <a:pPr algn="ctr">
-              <a:defRPr sz="720" b="1">
+              <a:defRPr sz="670" b="1">
                 <a:solidFill>
                   <a:srgbClr val="0369A1"/>
                 </a:solidFill>
@@ -3737,7 +3757,7 @@
           </a:p>
           <a:p>
             <a:pPr>
-              <a:defRPr sz="760" b="1">
+              <a:defRPr sz="740" b="1">
                 <a:solidFill>
                   <a:srgbClr val="0F172A"/>
                 </a:solidFill>
@@ -3745,7 +3765,11 @@
               </a:defRPr>
             </a:pPr>
             <a:r>
-              <a:t>多 Parallel Rank 一致消费与专家控制</a:t>
+              <a:t>张量并行多卡</a:t>
+            </a:r>
+            <a:br/>
+            <a:r>
+              <a:t>一致消费与控制</a:t>
             </a:r>
           </a:p>
         </p:txBody>
@@ -3872,7 +3896,7 @@
           <a:lstStyle/>
           <a:p>
             <a:pPr>
-              <a:defRPr sz="919" b="1">
+              <a:defRPr sz="900" b="1">
                 <a:solidFill>
                   <a:srgbClr val="1E40AF"/>
                 </a:solidFill>
@@ -3953,7 +3977,7 @@
           <a:lstStyle/>
           <a:p>
             <a:pPr>
-              <a:defRPr sz="880" b="1">
+              <a:defRPr sz="860" b="1">
                 <a:solidFill>
                   <a:srgbClr val="1E40AF"/>
                 </a:solidFill>
@@ -4004,11 +4028,11 @@
           </a:fontRef>
         </p:style>
         <p:txBody>
-          <a:bodyPr rtlCol="0" anchor="ctr" wrap="square" lIns="36576" rIns="36576" tIns="36576" bIns="36576"/>
+          <a:bodyPr rtlCol="0" anchor="ctr" wrap="square" lIns="27432" rIns="27432" tIns="27432" bIns="27432"/>
           <a:lstStyle/>
           <a:p>
             <a:pPr algn="ctr">
-              <a:defRPr sz="750" b="1">
+              <a:defRPr sz="720" b="1">
                 <a:solidFill>
                   <a:srgbClr val="FEF08A"/>
                 </a:solidFill>
@@ -4016,12 +4040,12 @@
               </a:defRPr>
             </a:pPr>
             <a:r>
-              <a:t>SR23-01-01-01 [核心枢纽组件库]</a:t>
+              <a:t>SR23-01-01-01 [组件库]</a:t>
             </a:r>
           </a:p>
           <a:p>
             <a:pPr>
-              <a:defRPr sz="850" b="1">
+              <a:defRPr sz="819" b="1">
                 <a:solidFill>
                   <a:srgbClr val="FFFFFF"/>
                 </a:solidFill>
@@ -4072,11 +4096,11 @@
           </a:fontRef>
         </p:style>
         <p:txBody>
-          <a:bodyPr rtlCol="0" anchor="ctr" wrap="square" lIns="36576" rIns="36576" tIns="36576" bIns="36576"/>
+          <a:bodyPr rtlCol="0" anchor="ctr" wrap="square" lIns="27432" rIns="27432" tIns="27432" bIns="27432"/>
           <a:lstStyle/>
           <a:p>
             <a:pPr algn="ctr">
-              <a:defRPr sz="700" b="1">
+              <a:defRPr sz="670" b="1">
                 <a:solidFill>
                   <a:srgbClr val="1E40AF"/>
                 </a:solidFill>
@@ -4089,7 +4113,7 @@
           </a:p>
           <a:p>
             <a:pPr>
-              <a:defRPr sz="750" b="1">
+              <a:defRPr sz="720" b="1">
                 <a:solidFill>
                   <a:srgbClr val="0F172A"/>
                 </a:solidFill>
@@ -4097,7 +4121,11 @@
               </a:defRPr>
             </a:pPr>
             <a:r>
-              <a:t>跨框架低时延前缀匹配引擎</a:t>
+              <a:t>跨框架低时延</a:t>
+            </a:r>
+            <a:br/>
+            <a:r>
+              <a:t>前缀匹配引擎</a:t>
             </a:r>
           </a:p>
         </p:txBody>
@@ -4140,11 +4168,11 @@
           </a:fontRef>
         </p:style>
         <p:txBody>
-          <a:bodyPr rtlCol="0" anchor="ctr" wrap="square" lIns="36576" rIns="36576" tIns="36576" bIns="36576"/>
+          <a:bodyPr rtlCol="0" anchor="ctr" wrap="square" lIns="27432" rIns="27432" tIns="27432" bIns="27432"/>
           <a:lstStyle/>
           <a:p>
             <a:pPr algn="ctr">
-              <a:defRPr sz="700" b="1">
+              <a:defRPr sz="670" b="1">
                 <a:solidFill>
                   <a:srgbClr val="1E40AF"/>
                 </a:solidFill>
@@ -4157,7 +4185,7 @@
           </a:p>
           <a:p>
             <a:pPr>
-              <a:defRPr sz="750" b="1">
+              <a:defRPr sz="720" b="1">
                 <a:solidFill>
                   <a:srgbClr val="0F172A"/>
                 </a:solidFill>
@@ -4165,7 +4193,11 @@
               </a:defRPr>
             </a:pPr>
             <a:r>
-              <a:t>本地元数据缓存与批量快判</a:t>
+              <a:t>本地元数据缓存</a:t>
+            </a:r>
+            <a:br/>
+            <a:r>
+              <a:t>与批量快判</a:t>
             </a:r>
           </a:p>
         </p:txBody>
@@ -4208,11 +4240,11 @@
           </a:fontRef>
         </p:style>
         <p:txBody>
-          <a:bodyPr rtlCol="0" anchor="ctr" wrap="square" lIns="36576" rIns="36576" tIns="36576" bIns="36576"/>
+          <a:bodyPr rtlCol="0" anchor="ctr" wrap="square" lIns="27432" rIns="27432" tIns="27432" bIns="27432"/>
           <a:lstStyle/>
           <a:p>
             <a:pPr algn="ctr">
-              <a:defRPr sz="700" b="1">
+              <a:defRPr sz="670" b="1">
                 <a:solidFill>
                   <a:srgbClr val="1E40AF"/>
                 </a:solidFill>
@@ -4225,7 +4257,7 @@
           </a:p>
           <a:p>
             <a:pPr>
-              <a:defRPr sz="750" b="1">
+              <a:defRPr sz="720" b="1">
                 <a:solidFill>
                   <a:srgbClr val="0F172A"/>
                 </a:solidFill>
@@ -4233,7 +4265,11 @@
               </a:defRPr>
             </a:pPr>
             <a:r>
-              <a:t>集群前缀目录核心与 HA 服务</a:t>
+              <a:t>集群前缀目录</a:t>
+            </a:r>
+            <a:br/>
+            <a:r>
+              <a:t>核心与高可用</a:t>
             </a:r>
           </a:p>
         </p:txBody>
@@ -4276,11 +4312,11 @@
           </a:fontRef>
         </p:style>
         <p:txBody>
-          <a:bodyPr rtlCol="0" anchor="ctr" wrap="square" lIns="36576" rIns="36576" tIns="36576" bIns="36576"/>
+          <a:bodyPr rtlCol="0" anchor="ctr" wrap="square" lIns="27432" rIns="27432" tIns="27432" bIns="27432"/>
           <a:lstStyle/>
           <a:p>
             <a:pPr algn="ctr">
-              <a:defRPr sz="700" b="1">
+              <a:defRPr sz="670" b="1">
                 <a:solidFill>
                   <a:srgbClr val="1E40AF"/>
                 </a:solidFill>
@@ -4293,7 +4329,7 @@
           </a:p>
           <a:p>
             <a:pPr>
-              <a:defRPr sz="750" b="1">
+              <a:defRPr sz="720" b="1">
                 <a:solidFill>
                   <a:srgbClr val="0F172A"/>
                 </a:solidFill>
@@ -4301,7 +4337,11 @@
               </a:defRPr>
             </a:pPr>
             <a:r>
-              <a:t>前缀目录本地快路径与资格检查</a:t>
+              <a:t>前缀目录本地快路径</a:t>
+            </a:r>
+            <a:br/>
+            <a:r>
+              <a:t>与消费资格检查</a:t>
             </a:r>
           </a:p>
         </p:txBody>
@@ -4374,7 +4414,7 @@
           <a:lstStyle/>
           <a:p>
             <a:pPr>
-              <a:defRPr sz="880" b="1">
+              <a:defRPr sz="860" b="1">
                 <a:solidFill>
                   <a:srgbClr val="1E40AF"/>
                 </a:solidFill>
@@ -4425,32 +4465,36 @@
           </a:fontRef>
         </p:style>
         <p:txBody>
-          <a:bodyPr rtlCol="0" anchor="ctr" wrap="square" lIns="36576" rIns="36576" tIns="36576" bIns="36576"/>
+          <a:bodyPr rtlCol="0" anchor="ctr" wrap="square" lIns="27432" rIns="27432" tIns="27432" bIns="27432"/>
           <a:lstStyle/>
           <a:p>
             <a:pPr algn="ctr">
+              <a:defRPr sz="650" b="1">
+                <a:solidFill>
+                  <a:srgbClr val="1E40AF"/>
+                </a:solidFill>
+                <a:latin typeface="Microsoft YaHei"/>
+              </a:defRPr>
+            </a:pPr>
+            <a:r>
+              <a:t>SR23-01-01-02 [策略插件]</a:t>
+            </a:r>
+          </a:p>
+          <a:p>
+            <a:pPr>
               <a:defRPr sz="700" b="1">
                 <a:solidFill>
-                  <a:srgbClr val="1E40AF"/>
-                </a:solidFill>
-                <a:latin typeface="Microsoft YaHei"/>
-              </a:defRPr>
-            </a:pPr>
-            <a:r>
-              <a:t>SR23-01-01-02 [策略插件]</a:t>
-            </a:r>
-          </a:p>
-          <a:p>
-            <a:pPr>
-              <a:defRPr sz="750" b="1">
-                <a:solidFill>
                   <a:srgbClr val="0F172A"/>
                 </a:solidFill>
                 <a:latin typeface="Microsoft YaHei"/>
               </a:defRPr>
             </a:pPr>
             <a:r>
-              <a:t>HBM↔SSD 分层容量与 DDR 角色</a:t>
+              <a:t>HBM↔SSD 分层容量</a:t>
+            </a:r>
+            <a:br/>
+            <a:r>
+              <a:t>与 DDR 角色</a:t>
             </a:r>
           </a:p>
         </p:txBody>
@@ -4493,32 +4537,36 @@
           </a:fontRef>
         </p:style>
         <p:txBody>
-          <a:bodyPr rtlCol="0" anchor="ctr" wrap="square" lIns="36576" rIns="36576" tIns="36576" bIns="36576"/>
+          <a:bodyPr rtlCol="0" anchor="ctr" wrap="square" lIns="27432" rIns="27432" tIns="27432" bIns="27432"/>
           <a:lstStyle/>
           <a:p>
             <a:pPr algn="ctr">
+              <a:defRPr sz="650" b="1">
+                <a:solidFill>
+                  <a:srgbClr val="1E40AF"/>
+                </a:solidFill>
+                <a:latin typeface="Microsoft YaHei"/>
+              </a:defRPr>
+            </a:pPr>
+            <a:r>
+              <a:t>SR23-01-01-03 [组件服务]</a:t>
+            </a:r>
+          </a:p>
+          <a:p>
+            <a:pPr>
               <a:defRPr sz="700" b="1">
                 <a:solidFill>
-                  <a:srgbClr val="1E40AF"/>
-                </a:solidFill>
-                <a:latin typeface="Microsoft YaHei"/>
-              </a:defRPr>
-            </a:pPr>
-            <a:r>
-              <a:t>SR23-01-01-03 [组件服务]</a:t>
-            </a:r>
-          </a:p>
-          <a:p>
-            <a:pPr>
-              <a:defRPr sz="750" b="1">
-                <a:solidFill>
                   <a:srgbClr val="0F172A"/>
                 </a:solidFill>
                 <a:latin typeface="Microsoft YaHei"/>
               </a:defRPr>
             </a:pPr>
             <a:r>
-              <a:t>KV 生命周期与空间治理控制器</a:t>
+              <a:t>KV 生命周期、迁移</a:t>
+            </a:r>
+            <a:br/>
+            <a:r>
+              <a:t>与空间治理</a:t>
             </a:r>
           </a:p>
         </p:txBody>
@@ -4561,32 +4609,36 @@
           </a:fontRef>
         </p:style>
         <p:txBody>
-          <a:bodyPr rtlCol="0" anchor="ctr" wrap="square" lIns="36576" rIns="36576" tIns="36576" bIns="36576"/>
+          <a:bodyPr rtlCol="0" anchor="ctr" wrap="square" lIns="27432" rIns="27432" tIns="27432" bIns="27432"/>
           <a:lstStyle/>
           <a:p>
             <a:pPr algn="ctr">
+              <a:defRPr sz="650" b="1">
+                <a:solidFill>
+                  <a:srgbClr val="1E40AF"/>
+                </a:solidFill>
+                <a:latin typeface="Microsoft YaHei"/>
+              </a:defRPr>
+            </a:pPr>
+            <a:r>
+              <a:t>SR23-01-10-01 [组件库]</a:t>
+            </a:r>
+          </a:p>
+          <a:p>
+            <a:pPr>
               <a:defRPr sz="700" b="1">
                 <a:solidFill>
-                  <a:srgbClr val="1E40AF"/>
-                </a:solidFill>
-                <a:latin typeface="Microsoft YaHei"/>
-              </a:defRPr>
-            </a:pPr>
-            <a:r>
-              <a:t>SR23-01-10-01 [组件库]</a:t>
-            </a:r>
-          </a:p>
-          <a:p>
-            <a:pPr>
-              <a:defRPr sz="750" b="1">
-                <a:solidFill>
                   <a:srgbClr val="0F172A"/>
                 </a:solidFill>
                 <a:latin typeface="Microsoft YaHei"/>
               </a:defRPr>
             </a:pPr>
             <a:r>
-              <a:t>共享 Attach、租约与快速回退</a:t>
+              <a:t>共享 Attach、租约</a:t>
+            </a:r>
+            <a:br/>
+            <a:r>
+              <a:t>与快速回退</a:t>
             </a:r>
           </a:p>
         </p:txBody>
@@ -4629,32 +4681,36 @@
           </a:fontRef>
         </p:style>
         <p:txBody>
-          <a:bodyPr rtlCol="0" anchor="ctr" wrap="square" lIns="36576" rIns="36576" tIns="36576" bIns="36576"/>
+          <a:bodyPr rtlCol="0" anchor="ctr" wrap="square" lIns="27432" rIns="27432" tIns="27432" bIns="27432"/>
           <a:lstStyle/>
           <a:p>
             <a:pPr algn="ctr">
+              <a:defRPr sz="650" b="1">
+                <a:solidFill>
+                  <a:srgbClr val="1E40AF"/>
+                </a:solidFill>
+                <a:latin typeface="Microsoft YaHei"/>
+              </a:defRPr>
+            </a:pPr>
+            <a:r>
+              <a:t>SR23-01-11-01 [组件服务]</a:t>
+            </a:r>
+          </a:p>
+          <a:p>
+            <a:pPr>
               <a:defRPr sz="700" b="1">
                 <a:solidFill>
-                  <a:srgbClr val="1E40AF"/>
-                </a:solidFill>
-                <a:latin typeface="Microsoft YaHei"/>
-              </a:defRPr>
-            </a:pPr>
-            <a:r>
-              <a:t>SR23-01-11-01 [组件服务]</a:t>
-            </a:r>
-          </a:p>
-          <a:p>
-            <a:pPr>
-              <a:defRPr sz="750" b="1">
-                <a:solidFill>
                   <a:srgbClr val="0F172A"/>
                 </a:solidFill>
                 <a:latin typeface="Microsoft YaHei"/>
               </a:defRPr>
             </a:pPr>
             <a:r>
-              <a:t>KV 发布、可见性与迁移一致性</a:t>
+              <a:t>KV 发布、可见性</a:t>
+            </a:r>
+            <a:br/>
+            <a:r>
+              <a:t>与迁移一致性</a:t>
             </a:r>
           </a:p>
         </p:txBody>
@@ -4697,32 +4753,36 @@
           </a:fontRef>
         </p:style>
         <p:txBody>
-          <a:bodyPr rtlCol="0" anchor="ctr" wrap="square" lIns="36576" rIns="36576" tIns="36576" bIns="36576"/>
+          <a:bodyPr rtlCol="0" anchor="ctr" wrap="square" lIns="27432" rIns="27432" tIns="27432" bIns="27432"/>
           <a:lstStyle/>
           <a:p>
             <a:pPr algn="ctr">
+              <a:defRPr sz="650" b="1">
+                <a:solidFill>
+                  <a:srgbClr val="1E40AF"/>
+                </a:solidFill>
+                <a:latin typeface="Microsoft YaHei"/>
+              </a:defRPr>
+            </a:pPr>
+            <a:r>
+              <a:t>SR23-01-11-02 [组件服务]</a:t>
+            </a:r>
+          </a:p>
+          <a:p>
+            <a:pPr>
               <a:defRPr sz="700" b="1">
                 <a:solidFill>
-                  <a:srgbClr val="1E40AF"/>
-                </a:solidFill>
-                <a:latin typeface="Microsoft YaHei"/>
-              </a:defRPr>
-            </a:pPr>
-            <a:r>
-              <a:t>SR23-01-11-02 [组件服务]</a:t>
-            </a:r>
-          </a:p>
-          <a:p>
-            <a:pPr>
-              <a:defRPr sz="750" b="1">
-                <a:solidFill>
                   <a:srgbClr val="0F172A"/>
                 </a:solidFill>
                 <a:latin typeface="Microsoft YaHei"/>
               </a:defRPr>
             </a:pPr>
             <a:r>
-              <a:t>多租户隔离与前后台 QoS 控制</a:t>
+              <a:t>多租户隔离与</a:t>
+            </a:r>
+            <a:br/>
+            <a:r>
+              <a:t>前后台 QoS 控制</a:t>
             </a:r>
           </a:p>
         </p:txBody>
@@ -4765,32 +4825,36 @@
           </a:fontRef>
         </p:style>
         <p:txBody>
-          <a:bodyPr rtlCol="0" anchor="ctr" wrap="square" lIns="36576" rIns="36576" tIns="36576" bIns="36576"/>
+          <a:bodyPr rtlCol="0" anchor="ctr" wrap="square" lIns="27432" rIns="27432" tIns="27432" bIns="27432"/>
           <a:lstStyle/>
           <a:p>
             <a:pPr algn="ctr">
+              <a:defRPr sz="650" b="1">
+                <a:solidFill>
+                  <a:srgbClr val="1E40AF"/>
+                </a:solidFill>
+                <a:latin typeface="Microsoft YaHei"/>
+              </a:defRPr>
+            </a:pPr>
+            <a:r>
+              <a:t>SR23-02-08-01 [组件工具]</a:t>
+            </a:r>
+          </a:p>
+          <a:p>
+            <a:pPr>
               <a:defRPr sz="700" b="1">
                 <a:solidFill>
-                  <a:srgbClr val="1E40AF"/>
-                </a:solidFill>
-                <a:latin typeface="Microsoft YaHei"/>
-              </a:defRPr>
-            </a:pPr>
-            <a:r>
-              <a:t>SR23-02-08-01 [组件工具]</a:t>
-            </a:r>
-          </a:p>
-          <a:p>
-            <a:pPr>
-              <a:defRPr sz="750" b="1">
-                <a:solidFill>
                   <a:srgbClr val="0F172A"/>
                 </a:solidFill>
                 <a:latin typeface="Microsoft YaHei"/>
               </a:defRPr>
             </a:pPr>
             <a:r>
-              <a:t>模型 KV 容量画像与生命周期配置</a:t>
+              <a:t>模型 KV 容量画像</a:t>
+            </a:r>
+            <a:br/>
+            <a:r>
+              <a:t>与生命周期配置</a:t>
             </a:r>
           </a:p>
         </p:txBody>
@@ -4833,32 +4897,32 @@
           </a:fontRef>
         </p:style>
         <p:txBody>
-          <a:bodyPr rtlCol="0" anchor="ctr" wrap="square" lIns="36576" rIns="36576" tIns="36576" bIns="36576"/>
+          <a:bodyPr rtlCol="0" anchor="ctr" wrap="square" lIns="27432" rIns="27432" tIns="27432" bIns="27432"/>
           <a:lstStyle/>
           <a:p>
             <a:pPr algn="ctr">
+              <a:defRPr sz="650" b="1">
+                <a:solidFill>
+                  <a:srgbClr val="1E40AF"/>
+                </a:solidFill>
+                <a:latin typeface="Microsoft YaHei"/>
+              </a:defRPr>
+            </a:pPr>
+            <a:r>
+              <a:t>SR23-02-09-01 [策略插件]</a:t>
+            </a:r>
+          </a:p>
+          <a:p>
+            <a:pPr>
               <a:defRPr sz="700" b="1">
                 <a:solidFill>
-                  <a:srgbClr val="1E40AF"/>
-                </a:solidFill>
-                <a:latin typeface="Microsoft YaHei"/>
-              </a:defRPr>
-            </a:pPr>
-            <a:r>
-              <a:t>SR23-02-09-01 [策略插件]</a:t>
-            </a:r>
-          </a:p>
-          <a:p>
-            <a:pPr>
-              <a:defRPr sz="750" b="1">
-                <a:solidFill>
                   <a:srgbClr val="0F172A"/>
                 </a:solidFill>
                 <a:latin typeface="Microsoft YaHei"/>
               </a:defRPr>
             </a:pPr>
             <a:r>
-              <a:t>热/冷 KV 分层驻留与复用策略</a:t>
+              <a:t>活跃/热/冷 KV 分层驻留与复用策略</a:t>
             </a:r>
           </a:p>
         </p:txBody>
@@ -4931,7 +4995,7 @@
           <a:lstStyle/>
           <a:p>
             <a:pPr>
-              <a:defRPr sz="880" b="1">
+              <a:defRPr sz="860" b="1">
                 <a:solidFill>
                   <a:srgbClr val="1E40AF"/>
                 </a:solidFill>
@@ -4982,11 +5046,11 @@
           </a:fontRef>
         </p:style>
         <p:txBody>
-          <a:bodyPr rtlCol="0" anchor="ctr" wrap="square" lIns="36576" rIns="36576" tIns="36576" bIns="36576"/>
+          <a:bodyPr rtlCol="0" anchor="ctr" wrap="square" lIns="27432" rIns="27432" tIns="27432" bIns="27432"/>
           <a:lstStyle/>
           <a:p>
             <a:pPr algn="ctr">
-              <a:defRPr sz="700" b="1">
+              <a:defRPr sz="670" b="1">
                 <a:solidFill>
                   <a:srgbClr val="1E40AF"/>
                 </a:solidFill>
@@ -4999,7 +5063,7 @@
           </a:p>
           <a:p>
             <a:pPr>
-              <a:defRPr sz="730" b="1">
+              <a:defRPr sz="710" b="1">
                 <a:solidFill>
                   <a:srgbClr val="0F172A"/>
                 </a:solidFill>
@@ -5007,7 +5071,11 @@
               </a:defRPr>
             </a:pPr>
             <a:r>
-              <a:t>布局与批量传输描述编译器</a:t>
+              <a:t>跨框架布局与</a:t>
+            </a:r>
+            <a:br/>
+            <a:r>
+              <a:t>批量描述编译器</a:t>
             </a:r>
           </a:p>
         </p:txBody>
@@ -5050,11 +5118,11 @@
           </a:fontRef>
         </p:style>
         <p:txBody>
-          <a:bodyPr rtlCol="0" anchor="ctr" wrap="square" lIns="36576" rIns="36576" tIns="36576" bIns="36576"/>
+          <a:bodyPr rtlCol="0" anchor="ctr" wrap="square" lIns="27432" rIns="27432" tIns="27432" bIns="27432"/>
           <a:lstStyle/>
           <a:p>
             <a:pPr algn="ctr">
-              <a:defRPr sz="700" b="1">
+              <a:defRPr sz="670" b="1">
                 <a:solidFill>
                   <a:srgbClr val="1E40AF"/>
                 </a:solidFill>
@@ -5067,7 +5135,7 @@
           </a:p>
           <a:p>
             <a:pPr>
-              <a:defRPr sz="730" b="1">
+              <a:defRPr sz="710" b="1">
                 <a:solidFill>
                   <a:srgbClr val="0F172A"/>
                 </a:solidFill>
@@ -5075,7 +5143,11 @@
               </a:defRPr>
             </a:pPr>
             <a:r>
-              <a:t>QueryPlan 与多副本成本决策</a:t>
+              <a:t>QueryPlan 与</a:t>
+            </a:r>
+            <a:br/>
+            <a:r>
+              <a:t>多副本成本决策</a:t>
             </a:r>
           </a:p>
         </p:txBody>
@@ -5118,11 +5190,11 @@
           </a:fontRef>
         </p:style>
         <p:txBody>
-          <a:bodyPr rtlCol="0" anchor="ctr" wrap="square" lIns="36576" rIns="36576" tIns="36576" bIns="36576"/>
+          <a:bodyPr rtlCol="0" anchor="ctr" wrap="square" lIns="27432" rIns="27432" tIns="27432" bIns="27432"/>
           <a:lstStyle/>
           <a:p>
             <a:pPr algn="ctr">
-              <a:defRPr sz="700" b="1">
+              <a:defRPr sz="670" b="1">
                 <a:solidFill>
                   <a:srgbClr val="1E40AF"/>
                 </a:solidFill>
@@ -5135,7 +5207,7 @@
           </a:p>
           <a:p>
             <a:pPr>
-              <a:defRPr sz="730" b="1">
+              <a:defRPr sz="710" b="1">
                 <a:solidFill>
                   <a:srgbClr val="0F172A"/>
                 </a:solidFill>
@@ -5143,7 +5215,11 @@
               </a:defRPr>
             </a:pPr>
             <a:r>
-              <a:t>统一传输意图与粒度分发</a:t>
+              <a:t>统一传输意图</a:t>
+            </a:r>
+            <a:br/>
+            <a:r>
+              <a:t>与粒度分发组件</a:t>
             </a:r>
           </a:p>
         </p:txBody>
@@ -5186,11 +5262,11 @@
           </a:fontRef>
         </p:style>
         <p:txBody>
-          <a:bodyPr rtlCol="0" anchor="ctr" wrap="square" lIns="36576" rIns="36576" tIns="36576" bIns="36576"/>
+          <a:bodyPr rtlCol="0" anchor="ctr" wrap="square" lIns="27432" rIns="27432" tIns="27432" bIns="27432"/>
           <a:lstStyle/>
           <a:p>
             <a:pPr algn="ctr">
-              <a:defRPr sz="700" b="1">
+              <a:defRPr sz="670" b="1">
                 <a:solidFill>
                   <a:srgbClr val="1E40AF"/>
                 </a:solidFill>
@@ -5203,7 +5279,7 @@
           </a:p>
           <a:p>
             <a:pPr>
-              <a:defRPr sz="730" b="1">
+              <a:defRPr sz="710" b="1">
                 <a:solidFill>
                   <a:srgbClr val="0F172A"/>
                 </a:solidFill>
@@ -5211,7 +5287,11 @@
               </a:defRPr>
             </a:pPr>
             <a:r>
-              <a:t>异步传输 DAG 与流水加载</a:t>
+              <a:t>异步传输 DAG</a:t>
+            </a:r>
+            <a:br/>
+            <a:r>
+              <a:t>与流水加载执行器</a:t>
             </a:r>
           </a:p>
         </p:txBody>
@@ -5254,11 +5334,11 @@
           </a:fontRef>
         </p:style>
         <p:txBody>
-          <a:bodyPr rtlCol="0" anchor="ctr" wrap="square" lIns="36576" rIns="36576" tIns="36576" bIns="36576"/>
+          <a:bodyPr rtlCol="0" anchor="ctr" wrap="square" lIns="27432" rIns="27432" tIns="27432" bIns="27432"/>
           <a:lstStyle/>
           <a:p>
             <a:pPr algn="ctr">
-              <a:defRPr sz="700" b="1">
+              <a:defRPr sz="670" b="1">
                 <a:solidFill>
                   <a:srgbClr val="1E40AF"/>
                 </a:solidFill>
@@ -5271,7 +5351,7 @@
           </a:p>
           <a:p>
             <a:pPr>
-              <a:defRPr sz="730" b="1">
+              <a:defRPr sz="710" b="1">
                 <a:solidFill>
                   <a:srgbClr val="0F172A"/>
                 </a:solidFill>
@@ -5279,7 +5359,11 @@
               </a:defRPr>
             </a:pPr>
             <a:r>
-              <a:t>一对多共享与可选多播 Provider</a:t>
+              <a:t>一对多共享与</a:t>
+            </a:r>
+            <a:br/>
+            <a:r>
+              <a:t>可选多播 Provider</a:t>
             </a:r>
           </a:p>
         </p:txBody>
@@ -5322,11 +5406,11 @@
           </a:fontRef>
         </p:style>
         <p:txBody>
-          <a:bodyPr rtlCol="0" anchor="ctr" wrap="square" lIns="36576" rIns="36576" tIns="36576" bIns="36576"/>
+          <a:bodyPr rtlCol="0" anchor="ctr" wrap="square" lIns="27432" rIns="27432" tIns="27432" bIns="27432"/>
           <a:lstStyle/>
           <a:p>
             <a:pPr algn="ctr">
-              <a:defRPr sz="700" b="1">
+              <a:defRPr sz="670" b="1">
                 <a:solidFill>
                   <a:srgbClr val="1E40AF"/>
                 </a:solidFill>
@@ -5339,7 +5423,7 @@
           </a:p>
           <a:p>
             <a:pPr>
-              <a:defRPr sz="730" b="1">
+              <a:defRPr sz="710" b="1">
                 <a:solidFill>
                   <a:srgbClr val="0F172A"/>
                 </a:solidFill>
@@ -5347,7 +5431,11 @@
               </a:defRPr>
             </a:pPr>
             <a:r>
-              <a:t>路径质量探测与动态路由</a:t>
+              <a:t>路径质量探测</a:t>
+            </a:r>
+            <a:br/>
+            <a:r>
+              <a:t>与动态路由组件</a:t>
             </a:r>
           </a:p>
         </p:txBody>
@@ -5474,7 +5562,7 @@
           <a:lstStyle/>
           <a:p>
             <a:pPr>
-              <a:defRPr sz="919" b="1">
+              <a:defRPr sz="900" b="1">
                 <a:solidFill>
                   <a:srgbClr val="065F46"/>
                 </a:solidFill>
@@ -5496,7 +5584,7 @@
         <p:spPr>
           <a:xfrm>
             <a:off x="502920" y="5349240"/>
-            <a:ext cx="1691640" cy="868680"/>
+            <a:ext cx="1417320" cy="850392"/>
           </a:xfrm>
           <a:prstGeom prst="rect">
             <a:avLst/>
@@ -5525,11 +5613,11 @@
           </a:fontRef>
         </p:style>
         <p:txBody>
-          <a:bodyPr rtlCol="0" anchor="ctr" wrap="square" lIns="36576" rIns="36576" tIns="36576" bIns="36576"/>
+          <a:bodyPr rtlCol="0" anchor="ctr" wrap="square" lIns="18288" rIns="18288" tIns="27432" bIns="27432"/>
           <a:lstStyle/>
           <a:p>
             <a:pPr algn="ctr">
-              <a:defRPr sz="720" b="1">
+              <a:defRPr sz="650" b="1">
                 <a:solidFill>
                   <a:srgbClr val="FEF08A"/>
                 </a:solidFill>
@@ -5537,12 +5625,12 @@
               </a:defRPr>
             </a:pPr>
             <a:r>
-              <a:t>SR23-01-09-01 [底座枢纽 / 平台]</a:t>
+              <a:t>SR23-01-09-01 [平台组件]</a:t>
             </a:r>
           </a:p>
           <a:p>
             <a:pPr>
-              <a:defRPr sz="850" b="1">
+              <a:defRPr sz="819" b="1">
                 <a:solidFill>
                   <a:srgbClr val="FFFFFF"/>
                 </a:solidFill>
@@ -5550,7 +5638,11 @@
               </a:defRPr>
             </a:pPr>
             <a:r>
-              <a:t>Capability 注册表与 Fabric 路由</a:t>
+              <a:t>统一能力注册表</a:t>
+            </a:r>
+            <a:br/>
+            <a:r>
+              <a:t>与互联路由器</a:t>
             </a:r>
           </a:p>
         </p:txBody>
@@ -5563,8 +5655,8 @@
         </p:nvSpPr>
         <p:spPr>
           <a:xfrm>
-            <a:off x="2240280" y="5349240"/>
-            <a:ext cx="1051560" cy="868680"/>
+            <a:off x="1975104" y="5349240"/>
+            <a:ext cx="1097280" cy="850392"/>
           </a:xfrm>
           <a:prstGeom prst="rect">
             <a:avLst/>
@@ -5593,11 +5685,11 @@
           </a:fontRef>
         </p:style>
         <p:txBody>
-          <a:bodyPr rtlCol="0" anchor="ctr" wrap="square" lIns="36576" rIns="36576" tIns="36576" bIns="36576"/>
+          <a:bodyPr rtlCol="0" anchor="ctr" wrap="square" lIns="18288" rIns="18288" tIns="27432" bIns="27432"/>
           <a:lstStyle/>
           <a:p>
             <a:pPr algn="ctr">
-              <a:defRPr sz="700" b="1">
+              <a:defRPr sz="590" b="1">
                 <a:solidFill>
                   <a:srgbClr val="065F46"/>
                 </a:solidFill>
@@ -5610,7 +5702,7 @@
           </a:p>
           <a:p>
             <a:pPr>
-              <a:defRPr sz="750" b="1">
+              <a:defRPr sz="690" b="1">
                 <a:solidFill>
                   <a:srgbClr val="0F172A"/>
                 </a:solidFill>
@@ -5618,7 +5710,11 @@
               </a:defRPr>
             </a:pPr>
             <a:r>
-              <a:t>跨节点 RDMA 零拷贝 Provider</a:t>
+              <a:t>跨节点 RDMA</a:t>
+            </a:r>
+            <a:br/>
+            <a:r>
+              <a:t>零拷贝 Provider</a:t>
             </a:r>
           </a:p>
         </p:txBody>
@@ -5631,8 +5727,8 @@
         </p:nvSpPr>
         <p:spPr>
           <a:xfrm>
-            <a:off x="3337560" y="5349240"/>
-            <a:ext cx="1051560" cy="868680"/>
+            <a:off x="3108960" y="5349240"/>
+            <a:ext cx="1097280" cy="850392"/>
           </a:xfrm>
           <a:prstGeom prst="rect">
             <a:avLst/>
@@ -5661,11 +5757,11 @@
           </a:fontRef>
         </p:style>
         <p:txBody>
-          <a:bodyPr rtlCol="0" anchor="ctr" wrap="square" lIns="36576" rIns="36576" tIns="36576" bIns="36576"/>
+          <a:bodyPr rtlCol="0" anchor="ctr" wrap="square" lIns="18288" rIns="18288" tIns="27432" bIns="27432"/>
           <a:lstStyle/>
           <a:p>
             <a:pPr algn="ctr">
-              <a:defRPr sz="700" b="1">
+              <a:defRPr sz="590" b="1">
                 <a:solidFill>
                   <a:srgbClr val="065F46"/>
                 </a:solidFill>
@@ -5678,7 +5774,7 @@
           </a:p>
           <a:p>
             <a:pPr>
-              <a:defRPr sz="750" b="1">
+              <a:defRPr sz="690" b="1">
                 <a:solidFill>
                   <a:srgbClr val="0F172A"/>
                 </a:solidFill>
@@ -5686,7 +5782,11 @@
               </a:defRPr>
             </a:pPr>
             <a:r>
-              <a:t>HBM↔SSD/Object 容量后端</a:t>
+              <a:t>HBM↔SSD/Object</a:t>
+            </a:r>
+            <a:br/>
+            <a:r>
+              <a:t>容量后端</a:t>
             </a:r>
           </a:p>
         </p:txBody>
@@ -5699,8 +5799,8 @@
         </p:nvSpPr>
         <p:spPr>
           <a:xfrm>
-            <a:off x="4434840" y="5349240"/>
-            <a:ext cx="1051560" cy="868680"/>
+            <a:off x="4242816" y="5349240"/>
+            <a:ext cx="1097280" cy="850392"/>
           </a:xfrm>
           <a:prstGeom prst="rect">
             <a:avLst/>
@@ -5729,11 +5829,11 @@
           </a:fontRef>
         </p:style>
         <p:txBody>
-          <a:bodyPr rtlCol="0" anchor="ctr" wrap="square" lIns="36576" rIns="36576" tIns="36576" bIns="36576"/>
+          <a:bodyPr rtlCol="0" anchor="ctr" wrap="square" lIns="18288" rIns="18288" tIns="27432" bIns="27432"/>
           <a:lstStyle/>
           <a:p>
             <a:pPr algn="ctr">
-              <a:defRPr sz="700" b="1">
+              <a:defRPr sz="590" b="1">
                 <a:solidFill>
                   <a:srgbClr val="065F46"/>
                 </a:solidFill>
@@ -5746,7 +5846,7 @@
           </a:p>
           <a:p>
             <a:pPr>
-              <a:defRPr sz="750" b="1">
+              <a:defRPr sz="690" b="1">
                 <a:solidFill>
                   <a:srgbClr val="0F172A"/>
                 </a:solidFill>
@@ -5754,7 +5854,11 @@
               </a:defRPr>
             </a:pPr>
             <a:r>
-              <a:t>DPU/硬件 Codec 条件卸载包</a:t>
+              <a:t>DPU/硬件 Codec</a:t>
+            </a:r>
+            <a:br/>
+            <a:r>
+              <a:t>条件卸载包</a:t>
             </a:r>
           </a:p>
         </p:txBody>
@@ -5767,8 +5871,8 @@
         </p:nvSpPr>
         <p:spPr>
           <a:xfrm>
-            <a:off x="5532120" y="5349240"/>
-            <a:ext cx="1051560" cy="868680"/>
+            <a:off x="5376672" y="5349240"/>
+            <a:ext cx="1097280" cy="850392"/>
           </a:xfrm>
           <a:prstGeom prst="rect">
             <a:avLst/>
@@ -5797,11 +5901,11 @@
           </a:fontRef>
         </p:style>
         <p:txBody>
-          <a:bodyPr rtlCol="0" anchor="ctr" wrap="square" lIns="36576" rIns="36576" tIns="36576" bIns="36576"/>
+          <a:bodyPr rtlCol="0" anchor="ctr" wrap="square" lIns="18288" rIns="18288" tIns="27432" bIns="27432"/>
           <a:lstStyle/>
           <a:p>
             <a:pPr algn="ctr">
-              <a:defRPr sz="700" b="1">
+              <a:defRPr sz="590" b="1">
                 <a:solidFill>
                   <a:srgbClr val="065F46"/>
                 </a:solidFill>
@@ -5814,7 +5918,7 @@
           </a:p>
           <a:p>
             <a:pPr>
-              <a:defRPr sz="750" b="1">
+              <a:defRPr sz="690" b="1">
                 <a:solidFill>
                   <a:srgbClr val="0F172A"/>
                 </a:solidFill>
@@ -5822,7 +5926,11 @@
               </a:defRPr>
             </a:pPr>
             <a:r>
-              <a:t>UBMEM Direct View 安全访问</a:t>
+              <a:t>UBMEM Direct</a:t>
+            </a:r>
+            <a:br/>
+            <a:r>
+              <a:t>View 安全访问</a:t>
             </a:r>
           </a:p>
         </p:txBody>
@@ -5835,8 +5943,8 @@
         </p:nvSpPr>
         <p:spPr>
           <a:xfrm>
-            <a:off x="6629400" y="5349240"/>
-            <a:ext cx="1051560" cy="868680"/>
+            <a:off x="6510528" y="5349240"/>
+            <a:ext cx="1097280" cy="850392"/>
           </a:xfrm>
           <a:prstGeom prst="rect">
             <a:avLst/>
@@ -5865,11 +5973,11 @@
           </a:fontRef>
         </p:style>
         <p:txBody>
-          <a:bodyPr rtlCol="0" anchor="ctr" wrap="square" lIns="36576" rIns="36576" tIns="36576" bIns="36576"/>
+          <a:bodyPr rtlCol="0" anchor="ctr" wrap="square" lIns="18288" rIns="18288" tIns="27432" bIns="27432"/>
           <a:lstStyle/>
           <a:p>
             <a:pPr algn="ctr">
-              <a:defRPr sz="700" b="1">
+              <a:defRPr sz="590" b="1">
                 <a:solidFill>
                   <a:srgbClr val="065F46"/>
                 </a:solidFill>
@@ -5882,7 +5990,7 @@
           </a:p>
           <a:p>
             <a:pPr>
-              <a:defRPr sz="750" b="1">
+              <a:defRPr sz="690" b="1">
                 <a:solidFill>
                   <a:srgbClr val="0F172A"/>
                 </a:solidFill>
@@ -5890,7 +5998,11 @@
               </a:defRPr>
             </a:pPr>
             <a:r>
-              <a:t>完整性证据与 RAS 故障映射</a:t>
+              <a:t>路径完整性证据</a:t>
+            </a:r>
+            <a:br/>
+            <a:r>
+              <a:t>与 RAS 映射</a:t>
             </a:r>
           </a:p>
         </p:txBody>
@@ -5903,8 +6015,8 @@
         </p:nvSpPr>
         <p:spPr>
           <a:xfrm>
-            <a:off x="7726679" y="5349240"/>
-            <a:ext cx="1051560" cy="868680"/>
+            <a:off x="7644383" y="5349240"/>
+            <a:ext cx="1097280" cy="850392"/>
           </a:xfrm>
           <a:prstGeom prst="rect">
             <a:avLst/>
@@ -5933,11 +6045,11 @@
           </a:fontRef>
         </p:style>
         <p:txBody>
-          <a:bodyPr rtlCol="0" anchor="ctr" wrap="square" lIns="36576" rIns="36576" tIns="36576" bIns="36576"/>
+          <a:bodyPr rtlCol="0" anchor="ctr" wrap="square" lIns="18288" rIns="18288" tIns="27432" bIns="27432"/>
           <a:lstStyle/>
           <a:p>
             <a:pPr algn="ctr">
-              <a:defRPr sz="700" b="1">
+              <a:defRPr sz="590" b="1">
                 <a:solidFill>
                   <a:srgbClr val="065F46"/>
                 </a:solidFill>
@@ -5950,7 +6062,7 @@
           </a:p>
           <a:p>
             <a:pPr>
-              <a:defRPr sz="750" b="1">
+              <a:defRPr sz="690" b="1">
                 <a:solidFill>
                   <a:srgbClr val="0F172A"/>
                 </a:solidFill>
@@ -5958,7 +6070,11 @@
               </a:defRPr>
             </a:pPr>
             <a:r>
-              <a:t>安全访问、资源下线与地址切换</a:t>
+              <a:t>安全访问、资源</a:t>
+            </a:r>
+            <a:br/>
+            <a:r>
+              <a:t>下线与地址切换</a:t>
             </a:r>
           </a:p>
         </p:txBody>
@@ -6031,7 +6147,7 @@
           <a:lstStyle/>
           <a:p>
             <a:pPr>
-              <a:defRPr sz="980" b="1">
+              <a:defRPr sz="950" b="1">
                 <a:solidFill>
                   <a:srgbClr val="5B21B6"/>
                 </a:solidFill>
@@ -6052,7 +6168,7 @@
         </p:nvSpPr>
         <p:spPr>
           <a:xfrm>
-            <a:off x="9189720" y="1051560"/>
+            <a:off x="9189720" y="1042415"/>
             <a:ext cx="2587752" cy="2423160"/>
           </a:xfrm>
           <a:prstGeom prst="rect">
@@ -6097,7 +6213,7 @@
         </p:nvSpPr>
         <p:spPr>
           <a:xfrm>
-            <a:off x="9253728" y="1078992"/>
+            <a:off x="9253728" y="1069848"/>
             <a:ext cx="2450592" cy="182880"/>
           </a:xfrm>
           <a:prstGeom prst="rect">
@@ -6112,7 +6228,7 @@
           <a:lstStyle/>
           <a:p>
             <a:pPr>
-              <a:defRPr sz="880" b="1">
+              <a:defRPr sz="860" b="1">
                 <a:solidFill>
                   <a:srgbClr val="5B21B6"/>
                 </a:solidFill>
@@ -6133,8 +6249,8 @@
         </p:nvSpPr>
         <p:spPr>
           <a:xfrm>
-            <a:off x="9253728" y="1280160"/>
-            <a:ext cx="2450592" cy="658368"/>
+            <a:off x="9253728" y="1271016"/>
+            <a:ext cx="2450592" cy="667512"/>
           </a:xfrm>
           <a:prstGeom prst="rect">
             <a:avLst/>
@@ -6163,11 +6279,11 @@
           </a:fontRef>
         </p:style>
         <p:txBody>
-          <a:bodyPr rtlCol="0" anchor="ctr" wrap="square" lIns="36576" rIns="36576" tIns="36576" bIns="36576"/>
+          <a:bodyPr rtlCol="0" anchor="ctr" wrap="square" lIns="27432" rIns="27432" tIns="27432" bIns="27432"/>
           <a:lstStyle/>
           <a:p>
             <a:pPr algn="ctr">
-              <a:defRPr sz="720" b="1">
+              <a:defRPr sz="680" b="1">
                 <a:solidFill>
                   <a:srgbClr val="5B21B6"/>
                 </a:solidFill>
@@ -6180,7 +6296,7 @@
           </a:p>
           <a:p>
             <a:pPr>
-              <a:defRPr sz="780" b="1">
+              <a:defRPr sz="740" b="1">
                 <a:solidFill>
                   <a:srgbClr val="0F172A"/>
                 </a:solidFill>
@@ -6188,7 +6304,7 @@
               </a:defRPr>
             </a:pPr>
             <a:r>
-              <a:t>KV 全路径 Telemetry 与指标 SDK</a:t>
+              <a:t>KV 全路径 Telemetry 与语义指标 SDK</a:t>
             </a:r>
           </a:p>
         </p:txBody>
@@ -6202,7 +6318,7 @@
         <p:spPr>
           <a:xfrm>
             <a:off x="9253728" y="1975104"/>
-            <a:ext cx="2450592" cy="658368"/>
+            <a:ext cx="2450592" cy="667512"/>
           </a:xfrm>
           <a:prstGeom prst="rect">
             <a:avLst/>
@@ -6231,11 +6347,11 @@
           </a:fontRef>
         </p:style>
         <p:txBody>
-          <a:bodyPr rtlCol="0" anchor="ctr" wrap="square" lIns="36576" rIns="36576" tIns="36576" bIns="36576"/>
+          <a:bodyPr rtlCol="0" anchor="ctr" wrap="square" lIns="27432" rIns="27432" tIns="27432" bIns="27432"/>
           <a:lstStyle/>
           <a:p>
             <a:pPr algn="ctr">
-              <a:defRPr sz="720" b="1">
+              <a:defRPr sz="680" b="1">
                 <a:solidFill>
                   <a:srgbClr val="5B21B6"/>
                 </a:solidFill>
@@ -6248,7 +6364,7 @@
           </a:p>
           <a:p>
             <a:pPr>
-              <a:defRPr sz="780" b="1">
+              <a:defRPr sz="740" b="1">
                 <a:solidFill>
                   <a:srgbClr val="0F172A"/>
                 </a:solidFill>
@@ -6256,7 +6372,7 @@
               </a:defRPr>
             </a:pPr>
             <a:r>
-              <a:t>链路追踪、Fallback 与 KVInspect</a:t>
+              <a:t>链路追踪、回退分析与 KVInspect 诊断</a:t>
             </a:r>
           </a:p>
         </p:txBody>
@@ -6269,8 +6385,8 @@
         </p:nvSpPr>
         <p:spPr>
           <a:xfrm>
-            <a:off x="9253728" y="2670048"/>
-            <a:ext cx="2450592" cy="694944"/>
+            <a:off x="9253728" y="2679191"/>
+            <a:ext cx="2450592" cy="667512"/>
           </a:xfrm>
           <a:prstGeom prst="rect">
             <a:avLst/>
@@ -6299,11 +6415,11 @@
           </a:fontRef>
         </p:style>
         <p:txBody>
-          <a:bodyPr rtlCol="0" anchor="ctr" wrap="square" lIns="36576" rIns="36576" tIns="36576" bIns="36576"/>
+          <a:bodyPr rtlCol="0" anchor="ctr" wrap="square" lIns="27432" rIns="27432" tIns="27432" bIns="27432"/>
           <a:lstStyle/>
           <a:p>
             <a:pPr algn="ctr">
-              <a:defRPr sz="720" b="1">
+              <a:defRPr sz="680" b="1">
                 <a:solidFill>
                   <a:srgbClr val="5B21B6"/>
                 </a:solidFill>
@@ -6316,7 +6432,7 @@
           </a:p>
           <a:p>
             <a:pPr>
-              <a:defRPr sz="780" b="1">
+              <a:defRPr sz="740" b="1">
                 <a:solidFill>
                   <a:srgbClr val="0F172A"/>
                 </a:solidFill>
@@ -6397,7 +6513,7 @@
           <a:lstStyle/>
           <a:p>
             <a:pPr>
-              <a:defRPr sz="880" b="1">
+              <a:defRPr sz="860" b="1">
                 <a:solidFill>
                   <a:srgbClr val="5B21B6"/>
                 </a:solidFill>
@@ -6448,11 +6564,11 @@
           </a:fontRef>
         </p:style>
         <p:txBody>
-          <a:bodyPr rtlCol="0" anchor="ctr" wrap="square" lIns="36576" rIns="36576" tIns="36576" bIns="36576"/>
+          <a:bodyPr rtlCol="0" anchor="ctr" wrap="square" lIns="27432" rIns="27432" tIns="27432" bIns="27432"/>
           <a:lstStyle/>
           <a:p>
             <a:pPr algn="ctr">
-              <a:defRPr sz="720" b="1">
+              <a:defRPr sz="680" b="1">
                 <a:solidFill>
                   <a:srgbClr val="5B21B6"/>
                 </a:solidFill>
@@ -6465,7 +6581,7 @@
           </a:p>
           <a:p>
             <a:pPr>
-              <a:defRPr sz="780" b="1">
+              <a:defRPr sz="740" b="1">
                 <a:solidFill>
                   <a:srgbClr val="0F172A"/>
                 </a:solidFill>
@@ -6473,7 +6589,7 @@
               </a:defRPr>
             </a:pPr>
             <a:r>
-              <a:t>核心组件 API 测试与 Mock 框架</a:t>
+              <a:t>核心组件单元/API 测试与 Mock 框架</a:t>
             </a:r>
           </a:p>
         </p:txBody>
@@ -6516,11 +6632,11 @@
           </a:fontRef>
         </p:style>
         <p:txBody>
-          <a:bodyPr rtlCol="0" anchor="ctr" wrap="square" lIns="36576" rIns="36576" tIns="36576" bIns="36576"/>
+          <a:bodyPr rtlCol="0" anchor="ctr" wrap="square" lIns="27432" rIns="27432" tIns="27432" bIns="27432"/>
           <a:lstStyle/>
           <a:p>
             <a:pPr algn="ctr">
-              <a:defRPr sz="720" b="1">
+              <a:defRPr sz="680" b="1">
                 <a:solidFill>
                   <a:srgbClr val="5B21B6"/>
                 </a:solidFill>
@@ -6533,7 +6649,7 @@
           </a:p>
           <a:p>
             <a:pPr>
-              <a:defRPr sz="780" b="1">
+              <a:defRPr sz="740" b="1">
                 <a:solidFill>
                   <a:srgbClr val="0F172A"/>
                 </a:solidFill>
@@ -6541,7 +6657,7 @@
               </a:defRPr>
             </a:pPr>
             <a:r>
-              <a:t>异构介质 E2E、长稳与混沌测试</a:t>
+              <a:t>异构介质 E2E、长稳与混沌测试平台</a:t>
             </a:r>
           </a:p>
         </p:txBody>
@@ -6584,11 +6700,11 @@
           </a:fontRef>
         </p:style>
         <p:txBody>
-          <a:bodyPr rtlCol="0" anchor="ctr" wrap="square" lIns="36576" rIns="36576" tIns="36576" bIns="36576"/>
+          <a:bodyPr rtlCol="0" anchor="ctr" wrap="square" lIns="27432" rIns="27432" tIns="27432" bIns="27432"/>
           <a:lstStyle/>
           <a:p>
             <a:pPr algn="ctr">
-              <a:defRPr sz="720" b="1">
+              <a:defRPr sz="680" b="1">
                 <a:solidFill>
                   <a:srgbClr val="5B21B6"/>
                 </a:solidFill>
@@ -6601,7 +6717,7 @@
           </a:p>
           <a:p>
             <a:pPr>
-              <a:defRPr sz="780" b="1">
+              <a:defRPr sz="740" b="1">
                 <a:solidFill>
                   <a:srgbClr val="0F172A"/>
                 </a:solidFill>
@@ -6609,7 +6725,7 @@
               </a:defRPr>
             </a:pPr>
             <a:r>
-              <a:t>跨平台构建、制品与灰度发布</a:t>
+              <a:t>跨平台构建、制品与灰度发布流水线</a:t>
             </a:r>
           </a:p>
         </p:txBody>
@@ -6652,11 +6768,11 @@
           </a:fontRef>
         </p:style>
         <p:txBody>
-          <a:bodyPr rtlCol="0" anchor="ctr" wrap="square" lIns="36576" rIns="36576" tIns="36576" bIns="36576"/>
+          <a:bodyPr rtlCol="0" anchor="ctr" wrap="square" lIns="27432" rIns="27432" tIns="27432" bIns="27432"/>
           <a:lstStyle/>
           <a:p>
             <a:pPr algn="ctr">
-              <a:defRPr sz="720" b="1">
+              <a:defRPr sz="680" b="1">
                 <a:solidFill>
                   <a:srgbClr val="5B21B6"/>
                 </a:solidFill>
@@ -6669,7 +6785,7 @@
           </a:p>
           <a:p>
             <a:pPr>
-              <a:defRPr sz="780" b="1">
+              <a:defRPr sz="740" b="1">
                 <a:solidFill>
                   <a:srgbClr val="0F172A"/>
                 </a:solidFill>
@@ -6677,7 +6793,7 @@
               </a:defRPr>
             </a:pPr>
             <a:r>
-              <a:t>工作负载回放与性能基准平台</a:t>
+              <a:t>KVCache 工作负载回放与性能基准平台</a:t>
             </a:r>
           </a:p>
         </p:txBody>
@@ -6690,8 +6806,8 @@
         </p:nvSpPr>
         <p:spPr>
           <a:xfrm>
-            <a:off x="274320" y="6419088"/>
-            <a:ext cx="11643055" cy="365760"/>
+            <a:off x="320040" y="6419088"/>
+            <a:ext cx="11551615" cy="347472"/>
           </a:xfrm>
           <a:prstGeom prst="rect">
             <a:avLst/>
@@ -6699,13 +6815,13 @@
           <a:noFill/>
         </p:spPr>
         <p:txBody>
-          <a:bodyPr wrap="square" lIns="0" tIns="0" rIns="0" bIns="0">
+          <a:bodyPr wrap="none" lIns="0" tIns="0" rIns="0" bIns="0">
             <a:spAutoFit/>
           </a:bodyPr>
           <a:lstStyle/>
           <a:p>
             <a:pPr>
-              <a:defRPr sz="850" b="1">
+              <a:defRPr sz="800" b="1">
                 <a:solidFill>
                   <a:srgbClr val="0F172A"/>
                 </a:solidFill>
@@ -6713,10 +6829,10 @@
               </a:defRPr>
             </a:pPr>
             <a:r>
-              <a:t>关系说明与图例标注：  </a:t>
-            </a:r>
-            <a:r>
-              <a:rPr sz="780" b="1">
+              <a:t>图例与关系说明： </a:t>
+            </a:r>
+            <a:r>
+              <a:rPr sz="760" b="1">
                 <a:solidFill>
                   <a:srgbClr val="1E40AF"/>
                 </a:solidFill>
@@ -6725,7 +6841,7 @@
               <a:t> [核心枢纽/中心] </a:t>
             </a:r>
             <a:r>
-              <a:rPr sz="780" b="1">
+              <a:rPr sz="760" b="1">
                 <a:solidFill>
                   <a:srgbClr val="475569"/>
                 </a:solidFill>
@@ -6734,7 +6850,7 @@
               <a:t> [功能闭包实体] </a:t>
             </a:r>
             <a:r>
-              <a:rPr sz="780" b="1">
+              <a:rPr sz="760" b="1">
                 <a:solidFill>
                   <a:srgbClr val="047857"/>
                 </a:solidFill>
@@ -6743,7 +6859,7 @@
               <a:t> [底座/协议使能] </a:t>
             </a:r>
             <a:r>
-              <a:rPr sz="780" b="1">
+              <a:rPr sz="760" b="1">
                 <a:solidFill>
                   <a:srgbClr val="6D28D9"/>
                 </a:solidFill>
@@ -6752,31 +6868,31 @@
               <a:t> [辅助研发测试] </a:t>
             </a:r>
             <a:r>
-              <a:rPr sz="780" b="1">
+              <a:rPr sz="760" b="1">
                 <a:solidFill>
                   <a:srgbClr val="64748B"/>
                 </a:solidFill>
                 <a:latin typeface="Microsoft YaHei"/>
               </a:rPr>
-              <a:t>  --&gt; 依赖/调用关系 (如访问请求、硬件任务描述符下发)  </a:t>
-            </a:r>
-            <a:r>
-              <a:rPr sz="780" b="1">
+              <a:t> │ ▼ 依赖/调用关系 (下发意图/描述符/回退契约) </a:t>
+            </a:r>
+            <a:r>
+              <a:rPr sz="760" b="1">
                 <a:solidFill>
                   <a:srgbClr val="64748B"/>
                 </a:solidFill>
                 <a:latin typeface="Microsoft YaHei"/>
               </a:rPr>
-              <a:t>  ==&gt; 层级收容与包含关系 (三层纵向架构切分)  </a:t>
-            </a:r>
-            <a:r>
-              <a:rPr sz="780" b="1">
+              <a:t> │ █ 层级收容关系 (三层纵向切分) </a:t>
+            </a:r>
+            <a:r>
+              <a:rPr sz="760" b="1">
                 <a:solidFill>
                   <a:srgbClr val="64748B"/>
                 </a:solidFill>
                 <a:latin typeface="Microsoft YaHei"/>
               </a:rPr>
-              <a:t>  ... 辅助支撑 (为全系统提供功能测试、Mock仿真、Trace验证与监控告警)  </a:t>
+              <a:t> │ ⋯ 辅助支撑 (Mock/仿真/Trace/监控) </a:t>
             </a:r>
           </a:p>
         </p:txBody>
